--- a/images/course_org.pptx
+++ b/images/course_org.pptx
@@ -4137,7 +4137,7 @@
             <a:avLst/>
           </a:prstGeom>
           <a:solidFill>
-            <a:srgbClr val="F6D6D2"/>
+            <a:srgbClr val="FBECE9"/>
           </a:solidFill>
           <a:ln>
             <a:noFill/>
@@ -4172,6 +4172,55 @@
               </a:rPr>
               <a:t>Data viz</a:t>
             </a:r>
+          </a:p>
+        </p:txBody>
+      </p:sp>
+      <p:sp>
+        <p:nvSpPr>
+          <p:cNvPr id="31" name="Rectangle 30">
+            <a:extLst>
+              <a:ext uri="{FF2B5EF4-FFF2-40B4-BE49-F238E27FC236}">
+                <a16:creationId xmlns:a16="http://schemas.microsoft.com/office/drawing/2014/main" id="{BFF0C6E4-DE05-5F77-0DFD-C68E18118A83}"/>
+              </a:ext>
+            </a:extLst>
+          </p:cNvPr>
+          <p:cNvSpPr/>
+          <p:nvPr/>
+        </p:nvSpPr>
+        <p:spPr>
+          <a:xfrm>
+            <a:off x="1562986" y="839972"/>
+            <a:ext cx="1371600" cy="946298"/>
+          </a:xfrm>
+          <a:prstGeom prst="rect">
+            <a:avLst/>
+          </a:prstGeom>
+          <a:solidFill>
+            <a:srgbClr val="FBEAF1"/>
+          </a:solidFill>
+        </p:spPr>
+        <p:style>
+          <a:lnRef idx="2">
+            <a:schemeClr val="accent1">
+              <a:shade val="15000"/>
+            </a:schemeClr>
+          </a:lnRef>
+          <a:fillRef idx="1">
+            <a:schemeClr val="accent1"/>
+          </a:fillRef>
+          <a:effectRef idx="0">
+            <a:schemeClr val="accent1"/>
+          </a:effectRef>
+          <a:fontRef idx="minor">
+            <a:schemeClr val="lt1"/>
+          </a:fontRef>
+        </p:style>
+        <p:txBody>
+          <a:bodyPr rtlCol="0" anchor="ctr"/>
+          <a:lstStyle/>
+          <a:p>
+            <a:pPr algn="ctr"/>
+            <a:endParaRPr lang="en-US"/>
           </a:p>
         </p:txBody>
       </p:sp>

--- a/images/course_org.pptx
+++ b/images/course_org.pptx
@@ -3785,10 +3785,7 @@
             <a:avLst/>
           </a:prstGeom>
           <a:solidFill>
-            <a:schemeClr val="bg2">
-              <a:lumMod val="90000"/>
-              <a:alpha val="29804"/>
-            </a:schemeClr>
+            <a:srgbClr val="FEF3E0"/>
           </a:solidFill>
           <a:ln>
             <a:noFill/>
@@ -3817,9 +3814,7 @@
             <a:r>
               <a:rPr lang="en-US" sz="1600" dirty="0">
                 <a:solidFill>
-                  <a:schemeClr val="bg2">
-                    <a:lumMod val="50000"/>
-                  </a:schemeClr>
+                  <a:srgbClr val="F49F1A"/>
                 </a:solidFill>
                 <a:latin typeface="Lato" panose="020F0502020204030203" pitchFamily="34" charset="77"/>
               </a:rPr>
@@ -3828,9 +3823,7 @@
             <a:r>
               <a:rPr lang="en-US" sz="1600" dirty="0" err="1">
                 <a:solidFill>
-                  <a:schemeClr val="bg2">
-                    <a:lumMod val="50000"/>
-                  </a:schemeClr>
+                  <a:srgbClr val="F49F1A"/>
                 </a:solidFill>
                 <a:latin typeface="Lato" panose="020F0502020204030203" pitchFamily="34" charset="77"/>
               </a:rPr>
@@ -3838,9 +3831,7 @@
             </a:r>
             <a:endParaRPr lang="en-US" sz="1600" dirty="0">
               <a:solidFill>
-                <a:schemeClr val="bg2">
-                  <a:lumMod val="50000"/>
-                </a:schemeClr>
+                <a:srgbClr val="F49F1A"/>
               </a:solidFill>
               <a:latin typeface="Lato" panose="020F0502020204030203" pitchFamily="34" charset="77"/>
             </a:endParaRPr>
